--- a/05.DM-Preproceso-Transformacion.pptx
+++ b/05.DM-Preproceso-Transformacion.pptx
@@ -5,7 +5,7 @@
     <p:sldMasterId id="2147483648" r:id="rId1"/>
   </p:sldMasterIdLst>
   <p:notesMasterIdLst>
-    <p:notesMasterId r:id="rId25"/>
+    <p:notesMasterId r:id="rId26"/>
   </p:notesMasterIdLst>
   <p:sldIdLst>
     <p:sldId id="256" r:id="rId2"/>
@@ -31,13 +31,14 @@
     <p:sldId id="1332" r:id="rId22"/>
     <p:sldId id="1341" r:id="rId23"/>
     <p:sldId id="1340" r:id="rId24"/>
+    <p:sldId id="1356" r:id="rId25"/>
   </p:sldIdLst>
   <p:sldSz cx="12192000" cy="6858000"/>
   <p:notesSz cx="6858000" cy="9144000"/>
   <p:embeddedFontLst>
     <p:embeddedFont>
       <p:font typeface="Microsoft Sans Serif" panose="020B0604020202020204" pitchFamily="34" charset="0"/>
-      <p:regular r:id="rId26"/>
+      <p:regular r:id="rId27"/>
     </p:embeddedFont>
   </p:embeddedFontLst>
   <p:defaultTextStyle>
@@ -274,7 +275,7 @@
       <p15:sldGuideLst xmlns:p15="http://schemas.microsoft.com/office/powerpoint/2012/main"/>
     </p:ext>
     <p:ext uri="http://customooxmlschemas.google.com/">
-      <go:slidesCustomData xmlns="" xmlns:mc="http://schemas.openxmlformats.org/markup-compatibility/2006" xmlns:mv="urn:schemas-microsoft-com:mac:vml" xmlns:c="http://schemas.openxmlformats.org/drawingml/2006/chart" xmlns:dgm="http://schemas.openxmlformats.org/drawingml/2006/diagram" xmlns:o="urn:schemas-microsoft-com:office:office" xmlns:v="urn:schemas-microsoft-com:vml" xmlns:pvml="urn:schemas-microsoft-com:office:powerpoint" xmlns:com="http://schemas.openxmlformats.org/drawingml/2006/compatibility" xmlns:p14="http://schemas.microsoft.com/office/powerpoint/2010/main" xmlns:p15="http://schemas.microsoft.com/office/powerpoint/2012/main" xmlns:ahyp="http://schemas.microsoft.com/office/drawing/2018/hyperlinkcolor" xmlns:go="http://customooxmlschemas.google.com/" r:id="rId83" roundtripDataSignature="AMtx7mhvwoM9eB9/dioecwqT0tewQNWU8w=="/>
+      <go:slidesCustomData xmlns:go="http://customooxmlschemas.google.com/" xmlns:ahyp="http://schemas.microsoft.com/office/drawing/2018/hyperlinkcolor" xmlns:p15="http://schemas.microsoft.com/office/powerpoint/2012/main" xmlns:p14="http://schemas.microsoft.com/office/powerpoint/2010/main" xmlns:com="http://schemas.openxmlformats.org/drawingml/2006/compatibility" xmlns:pvml="urn:schemas-microsoft-com:office:powerpoint" xmlns:v="urn:schemas-microsoft-com:vml" xmlns:o="urn:schemas-microsoft-com:office:office" xmlns:dgm="http://schemas.openxmlformats.org/drawingml/2006/diagram" xmlns:c="http://schemas.openxmlformats.org/drawingml/2006/chart" xmlns:mv="urn:schemas-microsoft-com:mac:vml" xmlns:mc="http://schemas.openxmlformats.org/markup-compatibility/2006" xmlns="" r:id="rId83" roundtripDataSignature="AMtx7mhvwoM9eB9/dioecwqT0tewQNWU8w=="/>
     </p:ext>
   </p:extLst>
 </p:presentation>
@@ -293,7 +294,7 @@
   <pc:docChgLst>
     <pc:chgData name="Norbey Muñoz" userId="b7e811e8891ccd42" providerId="LiveId" clId="{2482167B-ADD3-4E68-AB8B-ADE9CECE27D0}"/>
     <pc:docChg chg="undo custSel addSld delSld modSld sldOrd">
-      <pc:chgData name="Norbey Muñoz" userId="b7e811e8891ccd42" providerId="LiveId" clId="{2482167B-ADD3-4E68-AB8B-ADE9CECE27D0}" dt="2026-06-22T03:40:12.416" v="486" actId="20577"/>
+      <pc:chgData name="Norbey Muñoz" userId="b7e811e8891ccd42" providerId="LiveId" clId="{2482167B-ADD3-4E68-AB8B-ADE9CECE27D0}" dt="2026-07-08T04:19:40.238" v="811" actId="20577"/>
       <pc:docMkLst>
         <pc:docMk/>
       </pc:docMkLst>
@@ -464,20 +465,6 @@
           </ac:spMkLst>
         </pc:spChg>
       </pc:sldChg>
-      <pc:sldChg chg="del">
-        <pc:chgData name="Norbey Muñoz" userId="b7e811e8891ccd42" providerId="LiveId" clId="{2482167B-ADD3-4E68-AB8B-ADE9CECE27D0}" dt="2026-06-22T03:32:18.542" v="413" actId="47"/>
-        <pc:sldMkLst>
-          <pc:docMk/>
-          <pc:sldMk cId="1405802391" sldId="1333"/>
-        </pc:sldMkLst>
-      </pc:sldChg>
-      <pc:sldChg chg="del">
-        <pc:chgData name="Norbey Muñoz" userId="b7e811e8891ccd42" providerId="LiveId" clId="{2482167B-ADD3-4E68-AB8B-ADE9CECE27D0}" dt="2026-06-22T03:32:19.035" v="414" actId="47"/>
-        <pc:sldMkLst>
-          <pc:docMk/>
-          <pc:sldMk cId="438429635" sldId="1334"/>
-        </pc:sldMkLst>
-      </pc:sldChg>
       <pc:sldChg chg="modSp mod">
         <pc:chgData name="Norbey Muñoz" userId="b7e811e8891ccd42" providerId="LiveId" clId="{2482167B-ADD3-4E68-AB8B-ADE9CECE27D0}" dt="2026-06-10T13:21:44.459" v="384" actId="14100"/>
         <pc:sldMkLst>
@@ -573,6 +560,29 @@
             <pc:docMk/>
             <pc:sldMk cId="0" sldId="1355"/>
             <ac:spMk id="21" creationId="{00000000-0000-0000-0000-000000000000}"/>
+          </ac:spMkLst>
+        </pc:spChg>
+      </pc:sldChg>
+      <pc:sldChg chg="modSp add mod">
+        <pc:chgData name="Norbey Muñoz" userId="b7e811e8891ccd42" providerId="LiveId" clId="{2482167B-ADD3-4E68-AB8B-ADE9CECE27D0}" dt="2026-07-08T04:19:40.238" v="811" actId="20577"/>
+        <pc:sldMkLst>
+          <pc:docMk/>
+          <pc:sldMk cId="1924188671" sldId="1356"/>
+        </pc:sldMkLst>
+        <pc:spChg chg="mod">
+          <ac:chgData name="Norbey Muñoz" userId="b7e811e8891ccd42" providerId="LiveId" clId="{2482167B-ADD3-4E68-AB8B-ADE9CECE27D0}" dt="2026-07-08T04:19:40.238" v="811" actId="20577"/>
+          <ac:spMkLst>
+            <pc:docMk/>
+            <pc:sldMk cId="1924188671" sldId="1356"/>
+            <ac:spMk id="3" creationId="{982A2860-8F75-4A78-5ABC-A62D6F59CDB3}"/>
+          </ac:spMkLst>
+        </pc:spChg>
+        <pc:spChg chg="mod">
+          <ac:chgData name="Norbey Muñoz" userId="b7e811e8891ccd42" providerId="LiveId" clId="{2482167B-ADD3-4E68-AB8B-ADE9CECE27D0}" dt="2026-07-08T04:17:21.607" v="584" actId="20577"/>
+          <ac:spMkLst>
+            <pc:docMk/>
+            <pc:sldMk cId="1924188671" sldId="1356"/>
+            <ac:spMk id="108" creationId="{38226AC4-8280-DD74-7D84-BA1065B2B4EA}"/>
           </ac:spMkLst>
         </pc:spChg>
       </pc:sldChg>
@@ -6337,6 +6347,133 @@
 </p:notes>
 </file>
 
+<file path=ppt/notesSlides/notesSlide16.xml><?xml version="1.0" encoding="utf-8"?>
+<p:notes xmlns:a="http://schemas.openxmlformats.org/drawingml/2006/main" xmlns:r="http://schemas.openxmlformats.org/officeDocument/2006/relationships" xmlns:p="http://schemas.openxmlformats.org/presentationml/2006/main" showMasterSp="0" showMasterPhAnim="0">
+  <p:cSld>
+    <p:spTree>
+      <p:nvGrpSpPr>
+        <p:cNvPr id="1" name="Shape 102">
+          <a:extLst>
+            <a:ext uri="{FF2B5EF4-FFF2-40B4-BE49-F238E27FC236}">
+              <a16:creationId xmlns:a16="http://schemas.microsoft.com/office/drawing/2014/main" id="{18F28FF8-00E6-ADA8-95CB-F6786A4D8625}"/>
+            </a:ext>
+          </a:extLst>
+        </p:cNvPr>
+        <p:cNvGrpSpPr/>
+        <p:nvPr/>
+      </p:nvGrpSpPr>
+      <p:grpSpPr>
+        <a:xfrm>
+          <a:off x="0" y="0"/>
+          <a:ext cx="0" cy="0"/>
+          <a:chOff x="0" y="0"/>
+          <a:chExt cx="0" cy="0"/>
+        </a:xfrm>
+      </p:grpSpPr>
+      <p:sp>
+        <p:nvSpPr>
+          <p:cNvPr id="103" name="Google Shape;103;p2:notes">
+            <a:extLst>
+              <a:ext uri="{FF2B5EF4-FFF2-40B4-BE49-F238E27FC236}">
+                <a16:creationId xmlns:a16="http://schemas.microsoft.com/office/drawing/2014/main" id="{35C90014-8D3D-BD39-EF16-B5D3F6DFD898}"/>
+              </a:ext>
+            </a:extLst>
+          </p:cNvPr>
+          <p:cNvSpPr txBox="1">
+            <a:spLocks noGrp="1"/>
+          </p:cNvSpPr>
+          <p:nvPr>
+            <p:ph type="body" idx="1"/>
+          </p:nvPr>
+        </p:nvSpPr>
+        <p:spPr>
+          <a:xfrm>
+            <a:off x="685800" y="4400550"/>
+            <a:ext cx="5486400" cy="3600450"/>
+          </a:xfrm>
+          <a:prstGeom prst="rect">
+            <a:avLst/>
+          </a:prstGeom>
+        </p:spPr>
+        <p:txBody>
+          <a:bodyPr spcFirstLastPara="1" wrap="square" lIns="91425" tIns="45700" rIns="91425" bIns="45700" anchor="t" anchorCtr="0">
+            <a:noAutofit/>
+          </a:bodyPr>
+          <a:lstStyle/>
+          <a:p>
+            <a:pPr marL="0" lvl="0" indent="0" algn="l" rtl="0">
+              <a:spcBef>
+                <a:spcPts val="0"/>
+              </a:spcBef>
+              <a:spcAft>
+                <a:spcPts val="0"/>
+              </a:spcAft>
+              <a:buNone/>
+            </a:pPr>
+            <a:endParaRPr/>
+          </a:p>
+        </p:txBody>
+      </p:sp>
+      <p:sp>
+        <p:nvSpPr>
+          <p:cNvPr id="104" name="Google Shape;104;p2:notes">
+            <a:extLst>
+              <a:ext uri="{FF2B5EF4-FFF2-40B4-BE49-F238E27FC236}">
+                <a16:creationId xmlns:a16="http://schemas.microsoft.com/office/drawing/2014/main" id="{80705609-CB72-72B6-D561-8B335D5927E4}"/>
+              </a:ext>
+            </a:extLst>
+          </p:cNvPr>
+          <p:cNvSpPr>
+            <a:spLocks noGrp="1" noRot="1" noChangeAspect="1"/>
+          </p:cNvSpPr>
+          <p:nvPr>
+            <p:ph type="sldImg" idx="2"/>
+          </p:nvPr>
+        </p:nvSpPr>
+        <p:spPr>
+          <a:xfrm>
+            <a:off x="685800" y="1143000"/>
+            <a:ext cx="5486400" cy="3086100"/>
+          </a:xfrm>
+          <a:custGeom>
+            <a:avLst/>
+            <a:gdLst/>
+            <a:ahLst/>
+            <a:cxnLst/>
+            <a:rect l="l" t="t" r="r" b="b"/>
+            <a:pathLst>
+              <a:path w="120000" h="120000" extrusionOk="0">
+                <a:moveTo>
+                  <a:pt x="0" y="0"/>
+                </a:moveTo>
+                <a:lnTo>
+                  <a:pt x="120000" y="0"/>
+                </a:lnTo>
+                <a:lnTo>
+                  <a:pt x="120000" y="120000"/>
+                </a:lnTo>
+                <a:lnTo>
+                  <a:pt x="0" y="120000"/>
+                </a:lnTo>
+                <a:close/>
+              </a:path>
+            </a:pathLst>
+          </a:custGeom>
+        </p:spPr>
+      </p:sp>
+    </p:spTree>
+    <p:extLst>
+      <p:ext uri="{BB962C8B-B14F-4D97-AF65-F5344CB8AC3E}">
+        <p14:creationId xmlns:p14="http://schemas.microsoft.com/office/powerpoint/2010/main" val="4150896763"/>
+      </p:ext>
+    </p:extLst>
+  </p:cSld>
+  <p:clrMapOvr>
+    <a:masterClrMapping/>
+  </p:clrMapOvr>
+</p:notes>
+</file>
+
 <file path=ppt/notesSlides/notesSlide2.xml><?xml version="1.0" encoding="utf-8"?>
 <p:notes xmlns:a="http://schemas.openxmlformats.org/drawingml/2006/main" xmlns:r="http://schemas.openxmlformats.org/officeDocument/2006/relationships" xmlns:p="http://schemas.openxmlformats.org/presentationml/2006/main" showMasterSp="0" showMasterPhAnim="0">
   <p:cSld>
@@ -19143,6 +19280,252 @@
     <p:extLst>
       <p:ext uri="{BB962C8B-B14F-4D97-AF65-F5344CB8AC3E}">
         <p14:creationId xmlns:p14="http://schemas.microsoft.com/office/powerpoint/2010/main" val="426110878"/>
+      </p:ext>
+    </p:extLst>
+  </p:cSld>
+  <p:clrMapOvr>
+    <a:masterClrMapping/>
+  </p:clrMapOvr>
+</p:sld>
+</file>
+
+<file path=ppt/slides/slide24.xml><?xml version="1.0" encoding="utf-8"?>
+<p:sld xmlns:a="http://schemas.openxmlformats.org/drawingml/2006/main" xmlns:r="http://schemas.openxmlformats.org/officeDocument/2006/relationships" xmlns:p="http://schemas.openxmlformats.org/presentationml/2006/main">
+  <p:cSld>
+    <p:spTree>
+      <p:nvGrpSpPr>
+        <p:cNvPr id="1" name="Shape 105">
+          <a:extLst>
+            <a:ext uri="{FF2B5EF4-FFF2-40B4-BE49-F238E27FC236}">
+              <a16:creationId xmlns:a16="http://schemas.microsoft.com/office/drawing/2014/main" id="{849595A3-FB8A-D206-8133-6633DEC6E8DE}"/>
+            </a:ext>
+          </a:extLst>
+        </p:cNvPr>
+        <p:cNvGrpSpPr/>
+        <p:nvPr/>
+      </p:nvGrpSpPr>
+      <p:grpSpPr>
+        <a:xfrm>
+          <a:off x="0" y="0"/>
+          <a:ext cx="0" cy="0"/>
+          <a:chOff x="0" y="0"/>
+          <a:chExt cx="0" cy="0"/>
+        </a:xfrm>
+      </p:grpSpPr>
+      <p:cxnSp>
+        <p:nvCxnSpPr>
+          <p:cNvPr id="107" name="Google Shape;107;p2">
+            <a:extLst>
+              <a:ext uri="{FF2B5EF4-FFF2-40B4-BE49-F238E27FC236}">
+                <a16:creationId xmlns:a16="http://schemas.microsoft.com/office/drawing/2014/main" id="{42CFE95E-7718-B527-E7F5-BFAA15BE5E11}"/>
+              </a:ext>
+            </a:extLst>
+          </p:cNvPr>
+          <p:cNvCxnSpPr/>
+          <p:nvPr/>
+        </p:nvCxnSpPr>
+        <p:spPr>
+          <a:xfrm>
+            <a:off x="-15224" y="1210009"/>
+            <a:ext cx="4572000" cy="0"/>
+          </a:xfrm>
+          <a:prstGeom prst="straightConnector1">
+            <a:avLst/>
+          </a:prstGeom>
+          <a:noFill/>
+          <a:ln w="9525" cap="flat" cmpd="sng">
+            <a:solidFill>
+              <a:srgbClr val="FF6C1B"/>
+            </a:solidFill>
+            <a:prstDash val="solid"/>
+            <a:miter lim="800000"/>
+            <a:headEnd type="none" w="sm" len="sm"/>
+            <a:tailEnd type="oval" w="med" len="med"/>
+          </a:ln>
+        </p:spPr>
+      </p:cxnSp>
+      <p:sp>
+        <p:nvSpPr>
+          <p:cNvPr id="108" name="Google Shape;108;p2">
+            <a:extLst>
+              <a:ext uri="{FF2B5EF4-FFF2-40B4-BE49-F238E27FC236}">
+                <a16:creationId xmlns:a16="http://schemas.microsoft.com/office/drawing/2014/main" id="{38226AC4-8280-DD74-7D84-BA1065B2B4EA}"/>
+              </a:ext>
+            </a:extLst>
+          </p:cNvPr>
+          <p:cNvSpPr/>
+          <p:nvPr/>
+        </p:nvSpPr>
+        <p:spPr>
+          <a:xfrm>
+            <a:off x="629535" y="622999"/>
+            <a:ext cx="5042657" cy="584735"/>
+          </a:xfrm>
+          <a:prstGeom prst="rect">
+            <a:avLst/>
+          </a:prstGeom>
+          <a:noFill/>
+          <a:ln>
+            <a:noFill/>
+          </a:ln>
+        </p:spPr>
+        <p:txBody>
+          <a:bodyPr spcFirstLastPara="1" wrap="square" lIns="91425" tIns="45700" rIns="91425" bIns="45700" anchor="t" anchorCtr="0">
+            <a:spAutoFit/>
+          </a:bodyPr>
+          <a:lstStyle/>
+          <a:p>
+            <a:pPr marL="0" marR="0" lvl="0" indent="0" algn="l" rtl="0">
+              <a:spcBef>
+                <a:spcPts val="0"/>
+              </a:spcBef>
+              <a:spcAft>
+                <a:spcPts val="0"/>
+              </a:spcAft>
+              <a:buNone/>
+            </a:pPr>
+            <a:r>
+              <a:rPr lang="es-ES" sz="3200" b="1" dirty="0">
+                <a:solidFill>
+                  <a:srgbClr val="08287C"/>
+                </a:solidFill>
+              </a:rPr>
+              <a:t>Resumen</a:t>
+            </a:r>
+            <a:endParaRPr sz="2400" dirty="0">
+              <a:solidFill>
+                <a:srgbClr val="08287C"/>
+              </a:solidFill>
+              <a:latin typeface="Arial"/>
+              <a:ea typeface="Arial"/>
+              <a:cs typeface="Arial"/>
+              <a:sym typeface="Arial"/>
+            </a:endParaRPr>
+          </a:p>
+        </p:txBody>
+      </p:sp>
+      <p:sp>
+        <p:nvSpPr>
+          <p:cNvPr id="3" name="CuadroTexto 2">
+            <a:extLst>
+              <a:ext uri="{FF2B5EF4-FFF2-40B4-BE49-F238E27FC236}">
+                <a16:creationId xmlns:a16="http://schemas.microsoft.com/office/drawing/2014/main" id="{982A2860-8F75-4A78-5ABC-A62D6F59CDB3}"/>
+              </a:ext>
+            </a:extLst>
+          </p:cNvPr>
+          <p:cNvSpPr txBox="1"/>
+          <p:nvPr/>
+        </p:nvSpPr>
+        <p:spPr>
+          <a:xfrm>
+            <a:off x="999516" y="1525277"/>
+            <a:ext cx="10206747" cy="2246769"/>
+          </a:xfrm>
+          <a:prstGeom prst="rect">
+            <a:avLst/>
+          </a:prstGeom>
+          <a:noFill/>
+        </p:spPr>
+        <p:txBody>
+          <a:bodyPr wrap="square">
+            <a:spAutoFit/>
+          </a:bodyPr>
+          <a:lstStyle/>
+          <a:p>
+            <a:pPr marL="342900" lvl="0" indent="-342900" algn="just" rtl="0">
+              <a:lnSpc>
+                <a:spcPct val="100000"/>
+              </a:lnSpc>
+              <a:spcBef>
+                <a:spcPts val="0"/>
+              </a:spcBef>
+              <a:spcAft>
+                <a:spcPts val="0"/>
+              </a:spcAft>
+              <a:buFontTx/>
+              <a:buChar char="-"/>
+            </a:pPr>
+            <a:r>
+              <a:rPr lang="es-ES" sz="2000" dirty="0"/>
+              <a:t>Selección: filas/columnas y subjetiva/objetiva.</a:t>
+            </a:r>
+          </a:p>
+          <a:p>
+            <a:pPr marL="342900" lvl="0" indent="-342900" algn="just" rtl="0">
+              <a:lnSpc>
+                <a:spcPct val="100000"/>
+              </a:lnSpc>
+              <a:spcBef>
+                <a:spcPts val="0"/>
+              </a:spcBef>
+              <a:spcAft>
+                <a:spcPts val="0"/>
+              </a:spcAft>
+              <a:buFontTx/>
+              <a:buChar char="-"/>
+            </a:pPr>
+            <a:endParaRPr lang="es-ES" sz="2000" dirty="0"/>
+          </a:p>
+          <a:p>
+            <a:pPr marL="342900" lvl="0" indent="-342900" algn="just" rtl="0">
+              <a:lnSpc>
+                <a:spcPct val="100000"/>
+              </a:lnSpc>
+              <a:spcBef>
+                <a:spcPts val="0"/>
+              </a:spcBef>
+              <a:spcAft>
+                <a:spcPts val="0"/>
+              </a:spcAft>
+              <a:buFontTx/>
+              <a:buChar char="-"/>
+            </a:pPr>
+            <a:r>
+              <a:rPr lang="es-ES" sz="2000" dirty="0"/>
+              <a:t>Preprocesamiento: datos faltantes, valores atípicos, duplicados.</a:t>
+            </a:r>
+          </a:p>
+          <a:p>
+            <a:pPr marL="342900" lvl="0" indent="-342900" algn="just" rtl="0">
+              <a:lnSpc>
+                <a:spcPct val="100000"/>
+              </a:lnSpc>
+              <a:spcBef>
+                <a:spcPts val="0"/>
+              </a:spcBef>
+              <a:spcAft>
+                <a:spcPts val="0"/>
+              </a:spcAft>
+              <a:buFontTx/>
+              <a:buChar char="-"/>
+            </a:pPr>
+            <a:endParaRPr lang="es-ES" sz="2000" dirty="0"/>
+          </a:p>
+          <a:p>
+            <a:pPr marL="342900" lvl="0" indent="-342900" algn="just" rtl="0">
+              <a:lnSpc>
+                <a:spcPct val="100000"/>
+              </a:lnSpc>
+              <a:spcBef>
+                <a:spcPts val="0"/>
+              </a:spcBef>
+              <a:spcAft>
+                <a:spcPts val="0"/>
+              </a:spcAft>
+              <a:buFontTx/>
+              <a:buChar char="-"/>
+            </a:pPr>
+            <a:r>
+              <a:rPr lang="es-ES" sz="2000" dirty="0"/>
+              <a:t>Transformación: normalización/estandarización, binarización, discretización, codificación, agregación, transformación matemática, ingeniería de características, reducción de dimensionalidad.</a:t>
+            </a:r>
+          </a:p>
+        </p:txBody>
+      </p:sp>
+    </p:spTree>
+    <p:extLst>
+      <p:ext uri="{BB962C8B-B14F-4D97-AF65-F5344CB8AC3E}">
+        <p14:creationId xmlns:p14="http://schemas.microsoft.com/office/powerpoint/2010/main" val="1924188671"/>
       </p:ext>
     </p:extLst>
   </p:cSld>
